--- a/analises_exploratorias/E6_tipologias/E6_tipologias.pptx
+++ b/analises_exploratorias/E6_tipologias/E6_tipologias.pptx
@@ -18435,7 +18435,7 @@
                           <a:ea typeface="Cambria" pitchFamily="34" charset="-122"/>
                           <a:cs typeface="Cambria" pitchFamily="34" charset="-120"/>
                         </a:rPr>
-                        <a:t>0,2511</a:t>
+                        <a:t>0,2512</a:t>
                       </a:r>
                       <a:endParaRPr lang="en-US" sz="1000" dirty="0">
                         <a:latin typeface="Cambria" charset="0"/>
